--- a/templates/office/EMP_INT_010_사업수행계획서_발표용.pptx
+++ b/templates/office/EMP_INT_010_사업수행계획서_발표용.pptx
@@ -1489,7 +1489,7 @@
               </a:defRPr>
             </a:pPr>
             <a:r>
-              <a:t>한빛글로벌 SyncGuard AI 시스템 구축</a:t>
+              <a:t>한빛글로벌 SyncFlow AI 시스템 구축</a:t>
             </a:r>
           </a:p>
           <a:p>
@@ -1559,7 +1559,7 @@
           <p:cNvPr id="4" name="표 3">
             <a:extLst>
               <a:ext uri="{FF2B5EF4-FFF2-40B4-BE49-F238E27FC236}">
-                <a16:creationId xmlns:a16="http://schemas.microsoft.com/office/drawing/2014/main" id="{8C30FDA6-78DD-B219-5868-C81CE42609DB}"/>
+                <a16:creationId xmlns:a16="http://schemas.microsoft.com/office/drawing/2014/main" id="{8C30IATF6-78DD-B219-5868-C81CE42609DB}"/>
               </a:ext>
             </a:extLst>
           </p:cNvPr>
@@ -1623,7 +1623,7 @@
                       <a:pPr algn="ctr">
                         <a:defRPr sz="900" b="1">
                           <a:solidFill>
-                            <a:srgbClr val="1E293B"/>
+                            <a:srgbClr val="0F2942"/>
                           </a:solidFill>
                         </a:defRPr>
                       </a:pPr>
@@ -1675,7 +1675,7 @@
                       <a:pPr algn="ctr" latinLnBrk="1">
                         <a:defRPr sz="900">
                           <a:solidFill>
-                            <a:srgbClr val="1E293B"/>
+                            <a:srgbClr val="0F2942"/>
                           </a:solidFill>
                         </a:defRPr>
                       </a:pPr>
@@ -1692,7 +1692,7 @@
                       <a:pPr algn="ctr">
                         <a:defRPr sz="900" b="1">
                           <a:solidFill>
-                            <a:srgbClr val="1E293B"/>
+                            <a:srgbClr val="0F2942"/>
                           </a:solidFill>
                         </a:defRPr>
                       </a:pPr>
@@ -1744,7 +1744,7 @@
                       <a:pPr algn="ctr" latinLnBrk="1">
                         <a:defRPr sz="900">
                           <a:solidFill>
-                            <a:srgbClr val="1E293B"/>
+                            <a:srgbClr val="0F2942"/>
                           </a:solidFill>
                         </a:defRPr>
                       </a:pPr>
@@ -1768,7 +1768,7 @@
                       <a:pPr algn="ctr">
                         <a:defRPr sz="900">
                           <a:solidFill>
-                            <a:srgbClr val="1E293B"/>
+                            <a:srgbClr val="0F2942"/>
                           </a:solidFill>
                         </a:defRPr>
                       </a:pPr>
@@ -1824,7 +1824,7 @@
                       <a:pPr algn="ctr" fontAlgn="ctr">
                         <a:defRPr sz="900">
                           <a:solidFill>
-                            <a:srgbClr val="1E293B"/>
+                            <a:srgbClr val="0F2942"/>
                           </a:solidFill>
                         </a:defRPr>
                       </a:pPr>
@@ -1900,7 +1900,7 @@
                       <a:pPr algn="ctr">
                         <a:defRPr sz="900">
                           <a:solidFill>
-                            <a:srgbClr val="1E293B"/>
+                            <a:srgbClr val="0F2942"/>
                           </a:solidFill>
                         </a:defRPr>
                       </a:pPr>
@@ -1961,7 +1961,7 @@
                       <a:pPr algn="ctr" fontAlgn="ctr">
                         <a:defRPr sz="900">
                           <a:solidFill>
-                            <a:srgbClr val="1E293B"/>
+                            <a:srgbClr val="0F2942"/>
                           </a:solidFill>
                         </a:defRPr>
                       </a:pPr>
@@ -2031,7 +2031,7 @@
                       <a:pPr algn="ctr">
                         <a:defRPr sz="900">
                           <a:solidFill>
-                            <a:srgbClr val="1E293B"/>
+                            <a:srgbClr val="0F2942"/>
                           </a:solidFill>
                         </a:defRPr>
                       </a:pPr>
@@ -2083,7 +2083,7 @@
                       <a:pPr algn="ctr" latinLnBrk="1">
                         <a:defRPr sz="900">
                           <a:solidFill>
-                            <a:srgbClr val="1E293B"/>
+                            <a:srgbClr val="0F2942"/>
                           </a:solidFill>
                         </a:defRPr>
                       </a:pPr>
@@ -2100,7 +2100,7 @@
                       <a:pPr algn="ctr">
                         <a:defRPr sz="900">
                           <a:solidFill>
-                            <a:srgbClr val="1E293B"/>
+                            <a:srgbClr val="0F2942"/>
                           </a:solidFill>
                         </a:defRPr>
                       </a:pPr>
@@ -2152,7 +2152,7 @@
                       <a:pPr algn="ctr" latinLnBrk="1">
                         <a:defRPr sz="900">
                           <a:solidFill>
-                            <a:srgbClr val="1E293B"/>
+                            <a:srgbClr val="0F2942"/>
                           </a:solidFill>
                         </a:defRPr>
                       </a:pPr>
@@ -2393,7 +2393,7 @@
                       <a:pPr>
                         <a:defRPr sz="900" b="1">
                           <a:solidFill>
-                            <a:srgbClr val="1E293B"/>
+                            <a:srgbClr val="0F2942"/>
                           </a:solidFill>
                         </a:defRPr>
                       </a:pPr>
@@ -2416,7 +2416,7 @@
                       <a:pPr>
                         <a:defRPr sz="900" b="1">
                           <a:solidFill>
-                            <a:srgbClr val="1E293B"/>
+                            <a:srgbClr val="0F2942"/>
                           </a:solidFill>
                         </a:defRPr>
                       </a:pPr>
@@ -2439,7 +2439,7 @@
                       <a:pPr>
                         <a:defRPr sz="900" b="1">
                           <a:solidFill>
-                            <a:srgbClr val="1E293B"/>
+                            <a:srgbClr val="0F2942"/>
                           </a:solidFill>
                         </a:defRPr>
                       </a:pPr>
@@ -2462,7 +2462,7 @@
                       <a:pPr>
                         <a:defRPr sz="900" b="1">
                           <a:solidFill>
-                            <a:srgbClr val="1E293B"/>
+                            <a:srgbClr val="0F2942"/>
                           </a:solidFill>
                         </a:defRPr>
                       </a:pPr>
@@ -2560,7 +2560,7 @@
                         <a:defRPr sz="850"/>
                       </a:pPr>
                       <a:r>
-                        <a:t>RA 전문가 그룹</a:t>
+                        <a:t>법무·QA 전문위원 그룹</a:t>
                       </a:r>
                     </a:p>
                   </a:txBody>
@@ -2575,7 +2575,7 @@
                         <a:defRPr sz="850"/>
                       </a:pPr>
                       <a:r>
-                        <a:t>심의 기준 수립, 골든셋 정답 검증, 파일럿 검수</a:t>
+                        <a:t>검증 기준 수립, 골든셋 정답 검증, 파일럿 검수</a:t>
                       </a:r>
                     </a:p>
                   </a:txBody>
@@ -2642,7 +2642,7 @@
                         <a:defRPr sz="850"/>
                       </a:pPr>
                       <a:r>
-                        <a:t>SSO, MarketingHub, KT레몬 연계 인프라 및 보안 점검</a:t>
+                        <a:t>SSO, SRM-Portal, HB-Monitor 연계 인프라 및 보안 점검</a:t>
                       </a:r>
                     </a:p>
                   </a:txBody>
@@ -2694,7 +2694,7 @@
                         <a:defRPr sz="850"/>
                       </a:pPr>
                       <a:r>
-                        <a:t>현업 마케터</a:t>
+                        <a:t>현업 구매담당자</a:t>
                       </a:r>
                     </a:p>
                   </a:txBody>
@@ -2709,7 +2709,7 @@
                         <a:defRPr sz="850"/>
                       </a:pPr>
                       <a:r>
-                        <a:t>시안 검토 파일럿 참여, 화면 사용성 피드백</a:t>
+                        <a:t>계약·도서 검토 파일럿 참여, 화면 사용성 피드백</a:t>
                       </a:r>
                     </a:p>
                   </a:txBody>
@@ -2739,7 +2739,7 @@
                         <a:defRPr sz="850"/>
                       </a:pPr>
                       <a:r>
-                        <a:t>Spring Boot 비즈니스 로직, 심의 상태 관리, SSO/MarketingHub 연계</a:t>
+                        <a:t>Spring Boot 비즈니스 로직, 검증 상태 관리, SSO/SRM-Portal 연계</a:t>
                       </a:r>
                     </a:p>
                   </a:txBody>
@@ -2776,7 +2776,7 @@
                         <a:defRPr sz="850"/>
                       </a:pPr>
                       <a:r>
-                        <a:t>ProductLab 실증자료 연동 협의 및 효능 매핑 검수</a:t>
+                        <a:t>PLM-Nexus 시험성적서 연동 협의 및 성능규격 매핑 검수</a:t>
                       </a:r>
                     </a:p>
                   </a:txBody>
@@ -2806,7 +2806,7 @@
                         <a:defRPr sz="850"/>
                       </a:pPr>
                       <a:r>
-                        <a:t>KT 레몬(Option) 성분 동기화 배치, 불변 감사로그, 권한/코드 관리</a:t>
+                        <a:t>HB-Monitor(Option) 성분 동기화 배치, 불변 감사로그, 권한/코드 관리</a:t>
                       </a:r>
                     </a:p>
                   </a:txBody>
@@ -2858,7 +2858,7 @@
                         <a:defRPr sz="850"/>
                       </a:pPr>
                       <a:r>
-                        <a:t>실증 DB 전담 (데이터브릿지)</a:t>
+                        <a:t>시험검증 DB 전담 (데이터브릿지)</a:t>
                       </a:r>
                     </a:p>
                   </a:txBody>
@@ -2873,7 +2873,7 @@
                         <a:defRPr sz="850"/>
                       </a:pPr>
                       <a:r>
-                        <a:t>ProductLab 세포효능 및 기술원 실증 DB 구축·연동 전담</a:t>
+                        <a:t>PLM-Nexus 배상한도성능규격 및 기술원 시험검증 DB 구축·연동 전담</a:t>
                       </a:r>
                     </a:p>
                   </a:txBody>
@@ -5086,7 +5086,7 @@
                         <a:defRPr sz="800"/>
                       </a:pPr>
                       <a:r>
-                        <a:t>소스코드, 프롬프트명세서, ProductLab 연계명세서, 단위시험결과서 (EMP_TST_010)</a:t>
+                        <a:t>소스코드, 프롬프트명세서, PLM-Nexus 연계명세서, 단위시험결과서 (EMP_TST_010)</a:t>
                       </a:r>
                     </a:p>
                   </a:txBody>
@@ -9577,7 +9577,7 @@
                         <a:defRPr sz="850"/>
                       </a:pPr>
                       <a:r>
-                        <a:t>PPTX/PDF 시안 파싱, OCR 추출, 문장 분리/정제, 규제 문서 수집/임베딩</a:t>
+                        <a:t>PPTX/PDF 계약·도서 파싱, OCR 추출, 문장 분리/정제, 규제 문서 수집/임베딩</a:t>
                       </a:r>
                     </a:p>
                   </a:txBody>
@@ -9638,7 +9638,7 @@
                         <a:defRPr sz="850"/>
                       </a:pPr>
                       <a:r>
-                        <a:t>적합성 판정 및 RA 업무 효율화</a:t>
+                        <a:t>적합성 판정 및 QA 업무 효율화</a:t>
                       </a:r>
                     </a:p>
                   </a:txBody>
@@ -9887,7 +9887,7 @@
                         <a:defRPr sz="850"/>
                       </a:pPr>
                       <a:r>
-                        <a:t>적합성 판정 및 RA 업무 효율화</a:t>
+                        <a:t>적합성 판정 및 QA 업무 효율화</a:t>
                       </a:r>
                     </a:p>
                   </a:txBody>
@@ -10012,7 +10012,7 @@
                         <a:defRPr sz="850"/>
                       </a:pPr>
                       <a:r>
-                        <a:t>문안 정제 및 대조 (F-10, 12, 16)</a:t>
+                        <a:t>계약조항 정제 및 대조 (F-10, 12, 16)</a:t>
                       </a:r>
                     </a:p>
                   </a:txBody>
@@ -10075,7 +10075,7 @@
                         <a:defRPr sz="850"/>
                       </a:pPr>
                       <a:r>
-                        <a:t>대체 권장 표현 생성, 실증 필요 여부 분석, 1차 검토 자동 오케스트레이션</a:t>
+                        <a:t>대체 권장 표현 생성, 시험검증 필요 여부 분석, 1차 검토 자동 오케스트레이션</a:t>
                       </a:r>
                     </a:p>
                   </a:txBody>
@@ -10138,7 +10138,7 @@
                         <a:defRPr sz="850"/>
                       </a:pPr>
                       <a:r>
-                        <a:t>적합성 판정 및 RA 업무 효율화</a:t>
+                        <a:t>적합성 판정 및 QA 업무 효율화</a:t>
                       </a:r>
                     </a:p>
                   </a:txBody>
@@ -10326,7 +10326,7 @@
                         <a:defRPr sz="850"/>
                       </a:pPr>
                       <a:r>
-                        <a:t>역할별 권한(RBAC), 인앱/메일 알림, 시안 파일 업로드, 심의 의뢰/조회, 공식 PDF 리포트</a:t>
+                        <a:t>역할별 권한(RBAC), 인앱/메일 알림, 계약·도서 파일 업로드, 검증 요청/조회, 공식 PDF 리포트</a:t>
                       </a:r>
                     </a:p>
                   </a:txBody>
@@ -10389,7 +10389,7 @@
                         <a:defRPr sz="850"/>
                       </a:pPr>
                       <a:r>
-                        <a:t>적합성 판정 및 RA 업무 효율화</a:t>
+                        <a:t>적합성 판정 및 QA 업무 효율화</a:t>
                       </a:r>
                     </a:p>
                   </a:txBody>
@@ -10577,7 +10577,7 @@
                         <a:defRPr sz="850"/>
                       </a:pPr>
                       <a:r>
-                        <a:t>Canvas 2D 대조 뷰어, 문장별 3색 하이라이트, 실증 검증 화면, RA 최종 승인 UI</a:t>
+                        <a:t>Canvas 2D 대조 뷰어, 문장별 3색 하이라이트, 시험검증 검증 화면, QA 최종 승인 UI</a:t>
                       </a:r>
                     </a:p>
                   </a:txBody>
@@ -10640,7 +10640,7 @@
                         <a:defRPr sz="850"/>
                       </a:pPr>
                       <a:r>
-                        <a:t>적합성 판정 및 RA 업무 효율화</a:t>
+                        <a:t>적합성 판정 및 QA 업무 효율화</a:t>
                       </a:r>
                     </a:p>
                   </a:txBody>
@@ -10828,7 +10828,7 @@
                         <a:defRPr sz="850"/>
                       </a:pPr>
                       <a:r>
-                        <a:t>골든셋 벤치마크 평가, 심의 확정 불변 감사 로그, RA 피드백 사전 자동 갱신</a:t>
+                        <a:t>골든셋 벤치마크 평가, 검증 확정 불변 감사 로그, QA 피드백 사전 자동 갱신</a:t>
                       </a:r>
                     </a:p>
                   </a:txBody>
@@ -10891,7 +10891,7 @@
                         <a:defRPr sz="850"/>
                       </a:pPr>
                       <a:r>
-                        <a:t>적합성 판정 및 RA 업무 효율화</a:t>
+                        <a:t>적합성 판정 및 QA 업무 효율화</a:t>
                       </a:r>
                     </a:p>
                   </a:txBody>
@@ -11079,7 +11079,7 @@
                         <a:defRPr sz="850"/>
                       </a:pPr>
                       <a:r>
-                        <a:t>사내 SSO(OIDC), MarketingHub 심의 결과 회신, KT 레몬(Option) 성분 동기화, ProductLab 실증 연동</a:t>
+                        <a:t>사내 SSO(OIDC), SRM-Portal 검증 결과 회신, HB-Monitor(Option) 성분 동기화, PLM-Nexus 시험검증 연동</a:t>
                       </a:r>
                     </a:p>
                   </a:txBody>
@@ -11142,7 +11142,7 @@
                         <a:defRPr sz="850"/>
                       </a:pPr>
                       <a:r>
-                        <a:t>적합성 판정 및 RA 업무 효율화</a:t>
+                        <a:t>적합성 판정 및 QA 업무 효율화</a:t>
                       </a:r>
                     </a:p>
                   </a:txBody>
@@ -11393,7 +11393,7 @@
                         <a:defRPr sz="850"/>
                       </a:pPr>
                       <a:r>
-                        <a:t>적합성 판정 및 RA 업무 효율화</a:t>
+                        <a:t>적합성 판정 및 QA 업무 효율화</a:t>
                       </a:r>
                     </a:p>
                   </a:txBody>
@@ -13451,7 +13451,7 @@
               <a:defRPr sz="1150"/>
             </a:pPr>
             <a:r>
-              <a:t>성공적인 사업 완수를 위해 발주사(한빛글로벌)의 적극적인 협조를 요청드립니다.1. 심의 기준 및 과거 판정 데이터 제공   • 골든셋 구축을 위한 과거 심의 사례, 위반 판정 이력 및 식약처 소명 자료 조기 제공   • 화장품 브랜드별 고유 소구 가이드 및 우선 심의 대상 제품군 정의 협조2. 사내 연계 시스템 인터페이스 협조   • 사내 SSO(OIDC), MarketingHub, KT 레몬(Option), ProductLab 연계 규격 및 개발/테스트 계정 10~11월 중 확정   • 연계 담당 부서(정보전략팀, 기술원, KT레몬 담당) 실무 협의 미팅 지원3. RA 전문가 의사결정 채널 운영   • 3단계 판정 로직 및 표현 사전(금지/주의/허용) 검수를 위한 RA 실무 워킹그룹 참여   • 마일스톤(M1~M6) 단계별 산출물에 대한 신속한 피드백 및 승인4. 현업 사용자 파일럿 참여   • 4월 중 마케터 및 RA 담당자의 실제 시안 검토 파일럿 참여 및 사용성 피드백 제공</a:t>
+              <a:t>성공적인 사업 완수를 위해 발주사(한빛글로벌)의 적극적인 협조를 요청드립니다.1. 검증 기준 및 과거 판정 데이터 제공   • 골든셋 구축을 위한 과거 검증 사례, 위반 판정 이력 및 공정위·표준원 소명 자료 조기 제공   • 전장부품 사업부별 고유 기술사양 가이드 및 우선 검증 대상 제품군 정의 협조2. 사내 연계 시스템 인터페이스 협조   • 사내 SSO(OIDC), SRM-Portal, HB-Monitor(Option), PLM-Nexus 연계 규격 및 개발/테스트 계정 10~11월 중 확정   • 연계 담당 부서(정보전략팀, 기술원, HB-Monitor 담당) 실무 협의 미팅 지원3. 법무·QA 전문위원 의사결정 채널 운영   • 3단계 판정 로직 및 표현 사전(금지/주의/허용) 검수를 위한 QA 실무 워킹그룹 참여   • 마일스톤(M1~M6) 단계별 산출물에 대한 신속한 피드백 및 승인4. 현업 사용자 파일럿 참여   • 4월 중 구매담당자 및 법무·QA 담당자의 실제 계약·도서 검토 파일럿 참여 및 사용성 피드백 제공</a:t>
             </a:r>
             <a:br/>
             <a:br/>
@@ -14200,7 +14200,7 @@
               <a:defRPr sz="1300" b="0"/>
             </a:pPr>
             <a:r>
-              <a:t>엠파시(EMPASY)는 한빛글로벌 SyncGuard AI 시스템 구축을 통해 제품 표시·광고 가이드라인 준수 여부를 AI로 사전 심의하고, RA 전문가 판단을 지원하여 법적 리스크를 최소화하고 심의 업무 생산성을 혁신적으로 향상시키고자 합니다.</a:t>
+              <a:t>엠파시(EMPASY)는 한빛글로벌 SyncFlow AI 시스템 구축을 통해 구매계약·기술규격 가이드라인 준수 여부를 AI로 사전 검증하고, 법무·QA 전문위원 판단을 지원하여 법적 리스크를 최소화하고 검증 업무 생산성을 혁신적으로 향상시키고자 합니다.</a:t>
             </a:r>
           </a:p>
         </p:txBody>
@@ -14240,15 +14240,15 @@
             </a:r>
             <a:br/>
             <a:r>
-              <a:t>   • 식약처 및 공정위 제품 표시·광고 관리 가이드라인 규제 강화</a:t>
+              <a:t>   • 공정위 및 산업부 구매계약·기술규격 관리 가이드라인 규제 강화</a:t>
             </a:r>
             <a:br/>
             <a:r>
-              <a:t>   • 마케팅 상세페이지, SNS, 패키지 등 다변화된 시안 급증</a:t>
+              <a:t>   • 구매조달 물품공급계약서, 기술시방서, CAD 도면 등 다변화된 계약·도서 급증</a:t>
             </a:r>
             <a:br/>
             <a:r>
-              <a:t>   • 수작업 법령/원장 검색에 따른 RA 부서의 심의 병목 해소 필요</a:t>
+              <a:t>   • 수작업 법령/원장 검색에 따른 QA 부서의 검증 병목 해소 필요</a:t>
             </a:r>
             <a:br/>
             <a:br/>
@@ -14257,15 +14257,15 @@
             </a:r>
             <a:br/>
             <a:r>
-              <a:t>   • AI 사전 심의를 통한 1차 검토 자동화 및 업무 속도 50% 이상 단축</a:t>
+              <a:t>   • AI 사전 검증을 통한 1차 검토 자동화 및 업무 속도 50% 이상 단축</a:t>
             </a:r>
             <a:br/>
             <a:r>
-              <a:t>   • 3단계 판정 엔진으로 법령 위반 및 표시광고 리스크 선제 차단</a:t>
+              <a:t>   • 3단계 판정 엔진으로 법령 위반 및 계약·기술규격 리스크 선제 차단</a:t>
             </a:r>
             <a:br/>
             <a:r>
-              <a:t>   • RA 전문가 최종 승인 및 소명용 불변 감사로그 구축</a:t>
+              <a:t>   • 법무·QA 전문위원 최종 승인 및 소명용 불변 감사로그 구축</a:t>
             </a:r>
             <a:br/>
             <a:br/>
@@ -14306,7 +14306,7 @@
             <a:br/>
             <a:br/>
             <a:r>
-              <a:t>• 01. 시안 파일 처리 및 OCR (6개) : PPTX/PDF 파싱, 이미지 OCR 추출, 문장 분리/정제</a:t>
+              <a:t>• 01. 계약·도서 파일 처리 및 OCR (6개) : PPTX/PDF 파싱, 이미지 OCR 추출, 문장 분리/정제</a:t>
             </a:r>
             <a:br/>
             <a:r>
@@ -14314,7 +14314,7 @@
             </a:r>
             <a:br/>
             <a:r>
-              <a:t>• 03. 문안 정제 및 대조 (3개) : 대체 표현 권장안 생성, 실증 필요 여부 분석</a:t>
+              <a:t>• 03. 계약조항 정제 및 대조 (3개) : 대체 표현 권장안 생성, 시험검증 필요 여부 분석</a:t>
             </a:r>
             <a:br/>
             <a:r>
@@ -14322,15 +14322,15 @@
             </a:r>
             <a:br/>
             <a:r>
-              <a:t>• 05. 사용자 화면 (6개) : 2D 캔버스 대조 뷰어, 실증 검증 화면, RA 확정 UI</a:t>
+              <a:t>• 05. 사용자 화면 (6개) : 2D 캔버스 대조 뷰어, 시험검증 검증 화면, QA 확정 UI</a:t>
             </a:r>
             <a:br/>
             <a:r>
-              <a:t>• 06. 품질 관리 (4개) : 골든셋 벤치마크 평가, 심의 확정 불변 감사 로그</a:t>
+              <a:t>• 06. 품질 관리 (4개) : 골든셋 벤치마크 평가, 검증 확정 불변 감사 로그</a:t>
             </a:r>
             <a:br/>
             <a:r>
-              <a:t>• 07. 외부 연계 (4개) : 사내 SSO, MarketingHub 회신, KT레몬 동기화, ProductLab 연동</a:t>
+              <a:t>• 07. 외부 연계 (4개) : 사내 SSO, SRM-Portal 회신, HB-Monitor 동기화, PLM-Nexus 연동</a:t>
             </a:r>
             <a:br/>
             <a:r>
@@ -14435,7 +14435,7 @@
             <a:pPr>
               <a:defRPr sz="1300">
                 <a:solidFill>
-                  <a:srgbClr val="334155"/>
+                  <a:srgbClr val="1E3A5F"/>
                 </a:solidFill>
               </a:defRPr>
             </a:pPr>
@@ -15123,7 +15123,7 @@
                         <a:defRPr sz="850"/>
                       </a:pPr>
                       <a:r>
-                        <a:t>[06] SSO·MarketingHub·KT레몬 연계 개발</a:t>
+                        <a:t>[06] SSO·SRM-Portal·HB-Monitor 연계 개발</a:t>
                       </a:r>
                     </a:p>
                   </a:txBody>
@@ -15190,7 +15190,7 @@
                         <a:defRPr sz="850"/>
                       </a:pPr>
                       <a:r>
-                        <a:t>실증 DB</a:t>
+                        <a:t>시험검증 DB</a:t>
                       </a:r>
                     </a:p>
                   </a:txBody>
@@ -15205,7 +15205,7 @@
                         <a:defRPr sz="850"/>
                       </a:pPr>
                       <a:r>
-                        <a:t>[07] ProductLab 실증자료 DB 구축·연동</a:t>
+                        <a:t>[07] PLM-Nexus 시험성적서 DB 구축·연동</a:t>
                       </a:r>
                     </a:p>
                   </a:txBody>
@@ -15250,7 +15250,7 @@
                         <a:defRPr sz="850"/>
                       </a:pPr>
                       <a:r>
-                        <a:t>M3 실증연계 (2월말)</a:t>
+                        <a:t>M3 시험검증연계 (2월말)</a:t>
                       </a:r>
                     </a:p>
                   </a:txBody>
@@ -15451,7 +15451,7 @@
                         <a:defRPr sz="850"/>
                       </a:pPr>
                       <a:r>
-                        <a:t>[10] 마케터·RA 현업 파일럿</a:t>
+                        <a:t>[10] 구매담당자·QA 현업 파일럿</a:t>
                       </a:r>
                     </a:p>
                   </a:txBody>
@@ -15630,7 +15630,7 @@
                         <a:defRPr sz="850"/>
                       </a:pPr>
                       <a:r>
-                        <a:t>발주사 RA</a:t>
+                        <a:t>발주사 QA</a:t>
                       </a:r>
                     </a:p>
                   </a:txBody>
@@ -16069,7 +16069,7 @@
             </a:r>
             <a:br/>
             <a:r>
-              <a:t>• 마케터/연구원/RA/관리자 전용 웹 화면</a:t>
+              <a:t>• 구매담당/품질연구원/법무QA/관리자 전용 웹 화면</a:t>
             </a:r>
             <a:br/>
             <a:r>
@@ -16081,7 +16081,7 @@
             </a:r>
             <a:br/>
             <a:r>
-              <a:t>• 실증 자료 검증 및 RA 최종 승인 UI</a:t>
+              <a:t>• 시험성적서 검증 및 QA 최종 승인 UI</a:t>
             </a:r>
           </a:p>
         </p:txBody>
@@ -16116,11 +16116,11 @@
             </a:r>
             <a:br/>
             <a:r>
-              <a:t>• 심의 요청 접수 및 상태 머신 관리</a:t>
+              <a:t>• 검증 요청 접수 및 상태 머신 관리</a:t>
             </a:r>
             <a:br/>
             <a:r>
-              <a:t>• 판정 결과 집계 및 RA 확정 처리</a:t>
+              <a:t>• 판정 결과 집계 및 QA 확정 처리</a:t>
             </a:r>
             <a:br/>
             <a:r>
@@ -16167,15 +16167,15 @@
             </a:r>
             <a:br/>
             <a:r>
-              <a:t>• 2단계 : 식약처 가이드라인 하이브리드 RAG 근거 검색</a:t>
+              <a:t>• 2단계 : 공정위·표준원 가이드라인 하이브리드 RAG 근거 검색</a:t>
             </a:r>
             <a:br/>
             <a:r>
-              <a:t>• 3단계 : LLM 문맥 판정, 안전 대체문구 추천 Agent</a:t>
+              <a:t>• 3단계 : LLM 문맥 판정, 안전 표준수정조항 추천 Agent</a:t>
             </a:r>
             <a:br/>
             <a:r>
-              <a:t>• 환각 방지 가드레일 및 실증 필요 여부 분석</a:t>
+              <a:t>• 환각 방지 가드레일 및 시험검증 필요 여부 분석</a:t>
             </a:r>
           </a:p>
         </p:txBody>
@@ -16218,7 +16218,7 @@
             </a:r>
             <a:br/>
             <a:r>
-              <a:t>• MinIO / S3 파일 스토리지 (시안 및 리포트 원본)</a:t>
+              <a:t>• MinIO / S3 파일 스토리지 (계약·도서 및 리포트 원본)</a:t>
             </a:r>
           </a:p>
         </p:txBody>
@@ -16249,7 +16249,7 @@
               <a:defRPr sz="950"/>
             </a:pPr>
             <a:r>
-              <a:t>■ 5. 사내 연계 4종 (Enterprise Integration)• 사내 SSO : SAML 2.0 / OIDC 기반 통합 계정 인증• MarketingHub : 심의 완료 시 결과 요약 및 PDF URL 자동 회신• KT 레몬(Option) : 전성분 및 배합한도(%) 기준 데이터 일배치• ProductLab : 세포효능 보고서 및 실증자료 연동 (데이터브릿지)</a:t>
+              <a:t>■ 5. 사내 연계 4종 (Enterprise Integration)• 사내 SSO : SAML 2.0 / OIDC 기반 통합 계정 인증• SRM-Portal : 검증 완료 시 결과 요약 및 PDF URL 자동 회신• HB-Monitor(Option) : 자재BOM 및 유해물질한도(%) 기준 데이터 일배치• PLM-Nexus : 배상한도성능규격 보고서 및 시험성적서 연동 (데이터브릿지)</a:t>
             </a:r>
             <a:br/>
             <a:r>
@@ -16429,7 +16429,7 @@
                       <a:pPr algn="ctr" latinLnBrk="1">
                         <a:defRPr sz="800">
                           <a:solidFill>
-                            <a:srgbClr val="1E293B"/>
+                            <a:srgbClr val="0F2942"/>
                           </a:solidFill>
                         </a:defRPr>
                       </a:pPr>
@@ -16488,7 +16488,7 @@
                       <a:pPr algn="ctr" latinLnBrk="1">
                         <a:defRPr sz="800">
                           <a:solidFill>
-                            <a:srgbClr val="1E293B"/>
+                            <a:srgbClr val="0F2942"/>
                           </a:solidFill>
                         </a:defRPr>
                       </a:pPr>
@@ -16566,7 +16566,7 @@
                       <a:pPr algn="ctr" latinLnBrk="1">
                         <a:defRPr sz="800">
                           <a:solidFill>
-                            <a:srgbClr val="1E293B"/>
+                            <a:srgbClr val="0F2942"/>
                           </a:solidFill>
                         </a:defRPr>
                       </a:pPr>
@@ -16632,7 +16632,7 @@
                       <a:pPr>
                         <a:defRPr sz="800">
                           <a:solidFill>
-                            <a:srgbClr val="1E293B"/>
+                            <a:srgbClr val="0F2942"/>
                           </a:solidFill>
                         </a:defRPr>
                       </a:pPr>
@@ -16684,7 +16684,7 @@
                       <a:pPr>
                         <a:defRPr sz="800">
                           <a:solidFill>
-                            <a:srgbClr val="1E293B"/>
+                            <a:srgbClr val="0F2942"/>
                           </a:solidFill>
                         </a:defRPr>
                       </a:pPr>
@@ -16696,7 +16696,7 @@
                       <a:pPr>
                         <a:defRPr sz="800">
                           <a:solidFill>
-                            <a:srgbClr val="1E293B"/>
+                            <a:srgbClr val="0F2942"/>
                           </a:solidFill>
                         </a:defRPr>
                       </a:pPr>
@@ -16757,36 +16757,36 @@
                       <a:pPr>
                         <a:defRPr sz="800">
                           <a:solidFill>
-                            <a:srgbClr val="1E293B"/>
+                            <a:srgbClr val="0F2942"/>
                           </a:solidFill>
                         </a:defRPr>
                       </a:pPr>
                       <a:r>
-                        <a:t>1) 식약처 법령 청크 근거 기반 프롬프트 엔지니어링</a:t>
+                        <a:t>1) 공정위·표준원 법령 청크 근거 기반 프롬프트 엔지니어링</a:t>
                       </a:r>
                     </a:p>
                     <a:p>
                       <a:pPr>
                         <a:defRPr sz="800">
                           <a:solidFill>
-                            <a:srgbClr val="1E293B"/>
+                            <a:srgbClr val="0F2942"/>
                           </a:solidFill>
                         </a:defRPr>
                       </a:pPr>
                       <a:r>
-                        <a:t>2) 실증 매핑 가드레일 및 골든셋(정밀도 90% 이상) 지속 벤치마크 검증</a:t>
+                        <a:t>2) 시험검증 매핑 가드레일 및 골든셋(정밀도 90% 이상) 지속 벤치마크 검증</a:t>
                       </a:r>
                     </a:p>
                     <a:p>
                       <a:pPr>
                         <a:defRPr sz="800">
                           <a:solidFill>
-                            <a:srgbClr val="1E293B"/>
+                            <a:srgbClr val="0F2942"/>
                           </a:solidFill>
                         </a:defRPr>
                       </a:pPr>
                       <a:r>
-                        <a:t>3) RA 전문가 최종 승인 프로세스 의무화</a:t>
+                        <a:t>3) 법무·QA 전문위원 최종 승인 프로세스 의무화</a:t>
                       </a:r>
                     </a:p>
                   </a:txBody>
@@ -16840,7 +16840,7 @@
                       <a:pPr>
                         <a:defRPr sz="800">
                           <a:solidFill>
-                            <a:srgbClr val="1E293B"/>
+                            <a:srgbClr val="0F2942"/>
                           </a:solidFill>
                         </a:defRPr>
                       </a:pPr>
@@ -16892,19 +16892,19 @@
                       <a:pPr>
                         <a:defRPr sz="800">
                           <a:solidFill>
-                            <a:srgbClr val="1E293B"/>
+                            <a:srgbClr val="0F2942"/>
                           </a:solidFill>
                         </a:defRPr>
                       </a:pPr>
                       <a:r>
-                        <a:t>1) 사내 SSO, MarketingHub, KT레몬, ProductLab 연계 지연</a:t>
+                        <a:t>1) 사내 SSO, SRM-Portal, HB-Monitor, PLM-Nexus 연계 지연</a:t>
                       </a:r>
                     </a:p>
                     <a:p>
                       <a:pPr>
                         <a:defRPr sz="800">
                           <a:solidFill>
-                            <a:srgbClr val="1E293B"/>
+                            <a:srgbClr val="0F2942"/>
                           </a:solidFill>
                         </a:defRPr>
                       </a:pPr>
@@ -16965,7 +16965,7 @@
                       <a:pPr>
                         <a:defRPr sz="800">
                           <a:solidFill>
-                            <a:srgbClr val="1E293B"/>
+                            <a:srgbClr val="0F2942"/>
                           </a:solidFill>
                         </a:defRPr>
                       </a:pPr>
@@ -16977,7 +16977,7 @@
                       <a:pPr>
                         <a:defRPr sz="800">
                           <a:solidFill>
-                            <a:srgbClr val="1E293B"/>
+                            <a:srgbClr val="0F2942"/>
                           </a:solidFill>
                         </a:defRPr>
                       </a:pPr>
@@ -16989,7 +16989,7 @@
                       <a:pPr>
                         <a:defRPr sz="800">
                           <a:solidFill>
-                            <a:srgbClr val="1E293B"/>
+                            <a:srgbClr val="0F2942"/>
                           </a:solidFill>
                         </a:defRPr>
                       </a:pPr>
@@ -17048,7 +17048,7 @@
                       <a:pPr>
                         <a:defRPr sz="800">
                           <a:solidFill>
-                            <a:srgbClr val="1E293B"/>
+                            <a:srgbClr val="0F2942"/>
                           </a:solidFill>
                         </a:defRPr>
                       </a:pPr>
@@ -17100,19 +17100,19 @@
                       <a:pPr>
                         <a:defRPr sz="800">
                           <a:solidFill>
-                            <a:srgbClr val="1E293B"/>
+                            <a:srgbClr val="0F2942"/>
                           </a:solidFill>
                         </a:defRPr>
                       </a:pPr>
                       <a:r>
-                        <a:t>1) 복잡한 PPTX/PDF 및 이미지 시안 OCR 파싱 실패</a:t>
+                        <a:t>1) 복잡한 PPTX/PDF 및 이미지 계약·도서 OCR 파싱 실패</a:t>
                       </a:r>
                     </a:p>
                     <a:p>
                       <a:pPr>
                         <a:defRPr sz="800">
                           <a:solidFill>
-                            <a:srgbClr val="1E293B"/>
+                            <a:srgbClr val="0F2942"/>
                           </a:solidFill>
                         </a:defRPr>
                       </a:pPr>
@@ -17173,7 +17173,7 @@
                       <a:pPr>
                         <a:defRPr sz="800">
                           <a:solidFill>
-                            <a:srgbClr val="1E293B"/>
+                            <a:srgbClr val="0F2942"/>
                           </a:solidFill>
                         </a:defRPr>
                       </a:pPr>
@@ -17185,7 +17185,7 @@
                       <a:pPr>
                         <a:defRPr sz="800">
                           <a:solidFill>
-                            <a:srgbClr val="1E293B"/>
+                            <a:srgbClr val="0F2942"/>
                           </a:solidFill>
                         </a:defRPr>
                       </a:pPr>
@@ -17197,12 +17197,12 @@
                       <a:pPr>
                         <a:defRPr sz="800">
                           <a:solidFill>
-                            <a:srgbClr val="1E293B"/>
+                            <a:srgbClr val="0F2942"/>
                           </a:solidFill>
                         </a:defRPr>
                       </a:pPr>
                       <a:r>
-                        <a:t>3) Side-by-Side 뷰어에서 마케터/RA 수동 교정 UI 제공</a:t>
+                        <a:t>3) Side-by-Side 뷰어에서 구매담당자/QA 수동 교정 UI 제공</a:t>
                       </a:r>
                     </a:p>
                   </a:txBody>
@@ -17256,7 +17256,7 @@
                       <a:pPr>
                         <a:defRPr sz="800">
                           <a:solidFill>
-                            <a:srgbClr val="1E293B"/>
+                            <a:srgbClr val="0F2942"/>
                           </a:solidFill>
                         </a:defRPr>
                       </a:pPr>
@@ -17308,24 +17308,24 @@
                       <a:pPr>
                         <a:defRPr sz="800">
                           <a:solidFill>
-                            <a:srgbClr val="1E293B"/>
+                            <a:srgbClr val="0F2942"/>
                           </a:solidFill>
                         </a:defRPr>
                       </a:pPr>
                       <a:r>
-                        <a:t>1) 공정위/식약처 대외 사후 소명 시 데이터 정합성 문제</a:t>
+                        <a:t>1) 공정위/공정위·표준원 대외 사후 소명 시 데이터 정합성 문제</a:t>
                       </a:r>
                     </a:p>
                     <a:p>
                       <a:pPr>
                         <a:defRPr sz="800">
                           <a:solidFill>
-                            <a:srgbClr val="1E293B"/>
+                            <a:srgbClr val="0F2942"/>
                           </a:solidFill>
                         </a:defRPr>
                       </a:pPr>
                       <a:r>
-                        <a:t>2) 심의 당시의 판정 근거 및 원본 스냅샷 유실 위험</a:t>
+                        <a:t>2) 검증 당시의 판정 근거 및 원본 스냅샷 유실 위험</a:t>
                       </a:r>
                     </a:p>
                   </a:txBody>
@@ -17381,24 +17381,24 @@
                       <a:pPr>
                         <a:defRPr sz="800">
                           <a:solidFill>
-                            <a:srgbClr val="1E293B"/>
+                            <a:srgbClr val="0F2942"/>
                           </a:solidFill>
                         </a:defRPr>
                       </a:pPr>
                       <a:r>
-                        <a:t>1) RA 최종 확정 시점의 스냅샷을 수정/삭제가 불가능한 불변 감사 테이블(review_history_immutable)에 영구 보존</a:t>
+                        <a:t>1) QA 최종 확정 시점의 스냅샷을 수정/삭제가 불가능한 불변 감사 테이블(verify_history_immutable)에 영구 보존</a:t>
                       </a:r>
                     </a:p>
                     <a:p>
                       <a:pPr>
                         <a:defRPr sz="800">
                           <a:solidFill>
-                            <a:srgbClr val="1E293B"/>
+                            <a:srgbClr val="0F2942"/>
                           </a:solidFill>
                         </a:defRPr>
                       </a:pPr>
                       <a:r>
-                        <a:t>2) 원본 시안, 추출 문장, AI 판정, RA 코멘트 일체 해시 검증</a:t>
+                        <a:t>2) 원본 계약·도서, 추출 문장, AI 판정, QA 코멘트 일체 해시 검증</a:t>
                       </a:r>
                     </a:p>
                   </a:txBody>
@@ -17452,7 +17452,7 @@
                       <a:pPr algn="ctr" latinLnBrk="1">
                         <a:defRPr sz="800">
                           <a:solidFill>
-                            <a:srgbClr val="1E293B"/>
+                            <a:srgbClr val="0F2942"/>
                           </a:solidFill>
                         </a:defRPr>
                       </a:pPr>
@@ -17513,7 +17513,7 @@
                         <a:buAutoNum type="arabicParenR"/>
                         <a:defRPr sz="800">
                           <a:solidFill>
-                            <a:srgbClr val="1E293B"/>
+                            <a:srgbClr val="0F2942"/>
                           </a:solidFill>
                         </a:defRPr>
                       </a:pPr>
@@ -17562,7 +17562,7 @@
                         <a:buAutoNum type="arabicParenR"/>
                         <a:defRPr sz="800">
                           <a:solidFill>
-                            <a:srgbClr val="1E293B"/>
+                            <a:srgbClr val="0F2942"/>
                           </a:solidFill>
                         </a:defRPr>
                       </a:pPr>
@@ -17669,7 +17669,7 @@
                         <a:buAutoNum type="arabicParenR"/>
                         <a:defRPr sz="800">
                           <a:solidFill>
-                            <a:srgbClr val="1E293B"/>
+                            <a:srgbClr val="0F2942"/>
                           </a:solidFill>
                         </a:defRPr>
                       </a:pPr>
@@ -17714,7 +17714,7 @@
                         <a:buAutoNum type="arabicParenR"/>
                         <a:defRPr sz="800">
                           <a:solidFill>
-                            <a:srgbClr val="1E293B"/>
+                            <a:srgbClr val="0F2942"/>
                           </a:solidFill>
                         </a:defRPr>
                       </a:pPr>
@@ -18009,7 +18009,7 @@
                         <a:tabLst/>
                         <a:defRPr sz="800">
                           <a:solidFill>
-                            <a:srgbClr val="1E293B"/>
+                            <a:srgbClr val="0F2942"/>
                           </a:solidFill>
                         </a:defRPr>
                       </a:pPr>
@@ -18118,7 +18118,7 @@
                         <a:tabLst/>
                         <a:defRPr sz="800">
                           <a:solidFill>
-                            <a:srgbClr val="1E293B"/>
+                            <a:srgbClr val="0F2942"/>
                           </a:solidFill>
                         </a:defRPr>
                       </a:pPr>
@@ -18232,7 +18232,7 @@
                         <a:tabLst/>
                         <a:defRPr sz="800">
                           <a:solidFill>
-                            <a:srgbClr val="1E293B"/>
+                            <a:srgbClr val="0F2942"/>
                           </a:solidFill>
                         </a:defRPr>
                       </a:pPr>
@@ -18346,7 +18346,7 @@
                         <a:tabLst/>
                         <a:defRPr sz="800">
                           <a:solidFill>
-                            <a:srgbClr val="1E293B"/>
+                            <a:srgbClr val="0F2942"/>
                           </a:solidFill>
                         </a:defRPr>
                       </a:pPr>
@@ -18448,7 +18448,7 @@
                       <a:pPr>
                         <a:defRPr sz="800">
                           <a:solidFill>
-                            <a:srgbClr val="1E293B"/>
+                            <a:srgbClr val="0F2942"/>
                           </a:solidFill>
                         </a:defRPr>
                       </a:pPr>
@@ -18511,7 +18511,7 @@
                       <a:pPr>
                         <a:defRPr sz="800">
                           <a:solidFill>
-                            <a:srgbClr val="1E293B"/>
+                            <a:srgbClr val="0F2942"/>
                           </a:solidFill>
                         </a:defRPr>
                       </a:pPr>
@@ -18578,7 +18578,7 @@
                       <a:pPr>
                         <a:defRPr sz="800">
                           <a:solidFill>
-                            <a:srgbClr val="1E293B"/>
+                            <a:srgbClr val="0F2942"/>
                           </a:solidFill>
                         </a:defRPr>
                       </a:pPr>
@@ -18590,7 +18590,7 @@
                       <a:pPr>
                         <a:defRPr sz="800">
                           <a:solidFill>
-                            <a:srgbClr val="1E293B"/>
+                            <a:srgbClr val="0F2942"/>
                           </a:solidFill>
                         </a:defRPr>
                       </a:pPr>
@@ -18657,7 +18657,7 @@
                       <a:pPr>
                         <a:defRPr sz="800">
                           <a:solidFill>
-                            <a:srgbClr val="1E293B"/>
+                            <a:srgbClr val="0F2942"/>
                           </a:solidFill>
                         </a:defRPr>
                       </a:pPr>
@@ -18726,7 +18726,7 @@
                       <a:pPr>
                         <a:defRPr sz="800">
                           <a:solidFill>
-                            <a:srgbClr val="1E293B"/>
+                            <a:srgbClr val="0F2942"/>
                           </a:solidFill>
                         </a:defRPr>
                       </a:pPr>
@@ -18745,7 +18745,7 @@
                       <a:pPr>
                         <a:defRPr sz="800">
                           <a:solidFill>
-                            <a:srgbClr val="1E293B"/>
+                            <a:srgbClr val="0F2942"/>
                           </a:solidFill>
                         </a:defRPr>
                       </a:pPr>
@@ -18811,7 +18811,7 @@
                       <a:pPr>
                         <a:defRPr sz="800">
                           <a:solidFill>
-                            <a:srgbClr val="1E293B"/>
+                            <a:srgbClr val="0F2942"/>
                           </a:solidFill>
                         </a:defRPr>
                       </a:pPr>
@@ -18823,7 +18823,7 @@
                       <a:pPr>
                         <a:defRPr sz="800">
                           <a:solidFill>
-                            <a:srgbClr val="1E293B"/>
+                            <a:srgbClr val="0F2942"/>
                           </a:solidFill>
                         </a:defRPr>
                       </a:pPr>
@@ -18889,7 +18889,7 @@
                       <a:pPr>
                         <a:defRPr sz="800">
                           <a:solidFill>
-                            <a:srgbClr val="1E293B"/>
+                            <a:srgbClr val="0F2942"/>
                           </a:solidFill>
                         </a:defRPr>
                       </a:pPr>
@@ -18957,7 +18957,7 @@
                       <a:pPr>
                         <a:defRPr sz="800">
                           <a:solidFill>
-                            <a:srgbClr val="1E293B"/>
+                            <a:srgbClr val="0F2942"/>
                           </a:solidFill>
                         </a:defRPr>
                       </a:pPr>
@@ -19030,7 +19030,7 @@
                       <a:pPr>
                         <a:defRPr sz="800">
                           <a:solidFill>
-                            <a:srgbClr val="1E293B"/>
+                            <a:srgbClr val="0F2942"/>
                           </a:solidFill>
                         </a:defRPr>
                       </a:pPr>
@@ -19097,7 +19097,7 @@
                       <a:pPr>
                         <a:defRPr sz="800">
                           <a:solidFill>
-                            <a:srgbClr val="1E293B"/>
+                            <a:srgbClr val="0F2942"/>
                           </a:solidFill>
                         </a:defRPr>
                       </a:pPr>
@@ -19164,7 +19164,7 @@
                       <a:pPr>
                         <a:defRPr sz="800">
                           <a:solidFill>
-                            <a:srgbClr val="1E293B"/>
+                            <a:srgbClr val="0F2942"/>
                           </a:solidFill>
                         </a:defRPr>
                       </a:pPr>
@@ -19233,7 +19233,7 @@
                       <a:pPr>
                         <a:defRPr sz="800">
                           <a:solidFill>
-                            <a:srgbClr val="1E293B"/>
+                            <a:srgbClr val="0F2942"/>
                           </a:solidFill>
                         </a:defRPr>
                       </a:pPr>
@@ -19293,7 +19293,7 @@
                       <a:pPr>
                         <a:defRPr sz="800">
                           <a:solidFill>
-                            <a:srgbClr val="1E293B"/>
+                            <a:srgbClr val="0F2942"/>
                           </a:solidFill>
                         </a:defRPr>
                       </a:pPr>
@@ -19360,7 +19360,7 @@
                       <a:pPr>
                         <a:defRPr sz="800">
                           <a:solidFill>
-                            <a:srgbClr val="1E293B"/>
+                            <a:srgbClr val="0F2942"/>
                           </a:solidFill>
                         </a:defRPr>
                       </a:pPr>
@@ -19427,7 +19427,7 @@
                       <a:pPr>
                         <a:defRPr sz="800">
                           <a:solidFill>
-                            <a:srgbClr val="1E293B"/>
+                            <a:srgbClr val="0F2942"/>
                           </a:solidFill>
                         </a:defRPr>
                       </a:pPr>
@@ -19496,7 +19496,7 @@
                       <a:pPr>
                         <a:defRPr sz="800">
                           <a:solidFill>
-                            <a:srgbClr val="1E293B"/>
+                            <a:srgbClr val="0F2942"/>
                           </a:solidFill>
                         </a:defRPr>
                       </a:pPr>
@@ -19528,7 +19528,7 @@
                       <a:pPr>
                         <a:defRPr sz="800">
                           <a:solidFill>
-                            <a:srgbClr val="1E293B"/>
+                            <a:srgbClr val="0F2942"/>
                           </a:solidFill>
                         </a:defRPr>
                       </a:pPr>
@@ -19594,7 +19594,7 @@
                       <a:pPr>
                         <a:defRPr sz="800">
                           <a:solidFill>
-                            <a:srgbClr val="1E293B"/>
+                            <a:srgbClr val="0F2942"/>
                           </a:solidFill>
                         </a:defRPr>
                       </a:pPr>
@@ -19660,7 +19660,7 @@
                       <a:pPr>
                         <a:defRPr sz="800">
                           <a:solidFill>
-                            <a:srgbClr val="1E293B"/>
+                            <a:srgbClr val="0F2942"/>
                           </a:solidFill>
                         </a:defRPr>
                       </a:pPr>
@@ -19728,7 +19728,7 @@
                       <a:pPr>
                         <a:defRPr sz="800">
                           <a:solidFill>
-                            <a:srgbClr val="1E293B"/>
+                            <a:srgbClr val="0F2942"/>
                           </a:solidFill>
                         </a:defRPr>
                       </a:pPr>
@@ -19747,7 +19747,7 @@
                       <a:pPr>
                         <a:defRPr sz="800">
                           <a:solidFill>
-                            <a:srgbClr val="1E293B"/>
+                            <a:srgbClr val="0F2942"/>
                           </a:solidFill>
                         </a:defRPr>
                       </a:pPr>
@@ -19813,7 +19813,7 @@
                       <a:pPr>
                         <a:defRPr sz="800">
                           <a:solidFill>
-                            <a:srgbClr val="1E293B"/>
+                            <a:srgbClr val="0F2942"/>
                           </a:solidFill>
                         </a:defRPr>
                       </a:pPr>
@@ -19879,7 +19879,7 @@
                       <a:pPr>
                         <a:defRPr sz="800">
                           <a:solidFill>
-                            <a:srgbClr val="1E293B"/>
+                            <a:srgbClr val="0F2942"/>
                           </a:solidFill>
                         </a:defRPr>
                       </a:pPr>
@@ -19947,7 +19947,7 @@
                       <a:pPr>
                         <a:defRPr sz="800">
                           <a:solidFill>
-                            <a:srgbClr val="1E293B"/>
+                            <a:srgbClr val="0F2942"/>
                           </a:solidFill>
                         </a:defRPr>
                       </a:pPr>
@@ -20021,7 +20021,7 @@
                       <a:pPr>
                         <a:defRPr sz="800">
                           <a:solidFill>
-                            <a:srgbClr val="1E293B"/>
+                            <a:srgbClr val="0F2942"/>
                           </a:solidFill>
                         </a:defRPr>
                       </a:pPr>
@@ -20085,7 +20085,7 @@
                       <a:pPr>
                         <a:defRPr sz="800">
                           <a:solidFill>
-                            <a:srgbClr val="1E293B"/>
+                            <a:srgbClr val="0F2942"/>
                           </a:solidFill>
                         </a:defRPr>
                       </a:pPr>
@@ -20149,7 +20149,7 @@
                       <a:pPr>
                         <a:defRPr sz="800">
                           <a:solidFill>
-                            <a:srgbClr val="1E293B"/>
+                            <a:srgbClr val="0F2942"/>
                           </a:solidFill>
                         </a:defRPr>
                       </a:pPr>
